--- a/presentation/ProcGen_RL_terminal.pptx
+++ b/presentation/ProcGen_RL_terminal.pptx
@@ -151,17 +151,17 @@
   <p:extLst>
     <p:ext uri="{521415D9-36F7-43E2-AB2F-B90AF26B5E84}">
       <p14:sectionLst xmlns:p14="http://schemas.microsoft.com/office/powerpoint/2010/main">
-        <p14:section name="Title" id="{2bc2c0dc-d23a-064d-202c-98b50d4921e2}">
+        <p14:section name="Title" id="{172f3b33-caae-af10-35ad-38ede34e26b5}">
           <p14:sldIdLst>
             <p14:sldId id="256"/>
           </p14:sldIdLst>
         </p14:section>
-        <p14:section name="Agenda" id="{81b4b56a-ffab-8d55-8c0e-e06dd05c8700}">
+        <p14:section name="Agenda" id="{b3778a66-2022-b61d-54f2-9487300e4374}">
           <p14:sldIdLst>
             <p14:sldId id="257"/>
           </p14:sldIdLst>
         </p14:section>
-        <p14:section name="THE PROBLEM" id="{36dcb40e-fcde-ebb1-c4b8-dd6e8460d3cd}">
+        <p14:section name="THE PROBLEM" id="{584cc0a4-8d8f-df3a-e576-9014c4570aab}">
           <p14:sldIdLst>
             <p14:sldId id="258"/>
             <p14:sldId id="259"/>
@@ -169,7 +169,7 @@
             <p14:sldId id="261"/>
           </p14:sldIdLst>
         </p14:section>
-        <p14:section name="WHAT THE AGENT SEES" id="{dacab0b8-68d9-10c4-4058-479705efb3a0}">
+        <p14:section name="WHAT THE AGENT SEES" id="{8364d71e-51ec-2ce4-f94d-444d2456b94b}">
           <p14:sldIdLst>
             <p14:sldId id="262"/>
             <p14:sldId id="263"/>
@@ -179,7 +179,7 @@
             <p14:sldId id="267"/>
           </p14:sldIdLst>
         </p14:section>
-        <p14:section name="THE MODEL" id="{aa8331f2-478a-d945-cb7b-e320a2ae5ad2}">
+        <p14:section name="THE MODEL" id="{dd9ecc9e-023d-f167-c25b-763c45741374}">
           <p14:sldIdLst>
             <p14:sldId id="268"/>
             <p14:sldId id="269"/>
@@ -188,7 +188,7 @@
             <p14:sldId id="272"/>
           </p14:sldIdLst>
         </p14:section>
-        <p14:section name="HOW IT LEARNS" id="{a31993c2-10f1-7145-cafb-7394f74b74ed}">
+        <p14:section name="HOW IT LEARNS" id="{bd1a2ebe-d198-03f1-3b16-b895bacaec9c}">
           <p14:sldIdLst>
             <p14:sldId id="273"/>
             <p14:sldId id="274"/>
@@ -198,7 +198,7 @@
             <p14:sldId id="278"/>
           </p14:sldIdLst>
         </p14:section>
-        <p14:section name="OPENING THE BLACK BOX" id="{050e677e-cd4e-510c-2398-da28de9eaadf}">
+        <p14:section name="OPENING THE BLACK BOX" id="{f3b3bcde-104d-50ab-8a24-8af4ea9766bc}">
           <p14:sldIdLst>
             <p14:sldId id="279"/>
             <p14:sldId id="280"/>
@@ -211,7 +211,7 @@
             <p14:sldId id="287"/>
           </p14:sldIdLst>
         </p14:section>
-        <p14:section name="RESULTS" id="{f82dfed3-977f-834b-88d0-72d7ef1ac553}">
+        <p14:section name="RESULTS" id="{17eb416a-c215-e54f-97f5-b14cc7e4f877}">
           <p14:sldIdLst>
             <p14:sldId id="288"/>
             <p14:sldId id="289"/>
@@ -222,7 +222,7 @@
             <p14:sldId id="294"/>
           </p14:sldIdLst>
         </p14:section>
-        <p14:section name="DEMO" id="{7a6f833b-4762-2339-b9d8-38e2682708bb}">
+        <p14:section name="DEMO" id="{d75999d2-a5fa-b143-92be-ffc5a098f046}">
           <p14:sldIdLst>
             <p14:sldId id="295"/>
             <p14:sldId id="296"/>
@@ -230,7 +230,7 @@
             <p14:sldId id="298"/>
           </p14:sldIdLst>
         </p14:section>
-        <p14:section name="APPENDIX" id="{13be5c1f-6107-fcc2-ebe5-a4a504a27eee}">
+        <p14:section name="APPENDIX" id="{effc9c96-573e-473f-5f18-f219559e7bef}">
           <p14:sldIdLst>
             <p14:sldId id="299"/>
             <p14:sldId id="300"/>
@@ -3148,7 +3148,7 @@
           <a:p>
             <a:r>
               <a:rPr lang="en-US" dirty="0"/>
-              <a:t>This is the new debug mode in the demo. One ghost plays alone, and everything it computes is on screen. The white frame on the level is exactly what it sees, and the orange tiles are the ones its current decision depends on most. On the right: the three tile layers exactly as the network receives them, the seven numbers about itself, how much each group of inputs matters right now, and the network itself: every one of the 512 hidden neurons lit by how strongly it fires, with the strongest connections behind the chosen action drawn as lines. Bottom left are the six output probabilities. You can pause and step one decision at a time. Here it is about to land between two spikes: the orange tiles sit on the spike ahead, and it is 99 percent sure about pressing right without jumping.</a:t>
+              <a:t>This is the new debug mode in the demo. One ghost plays alone, and everything it computes is on screen. The white frame on the level is exactly what it sees, and the orange tiles are the ones its current decision depends on most. On the right: the three tile layers exactly as the network receives them, the seven numbers about itself, how much each group of inputs matters right now, and the network itself: every one of the 512 hidden neurons lit by how strongly it fires, with the strongest connections behind the chosen action drawn as lines. Bottom left are the six output probabilities. You can pause and step one decision at a time, forwards or backwards. Here it is about to land between two spikes: the orange tiles sit on the spike ahead, and it is 99 percent sure about pressing right without jumping.</a:t>
             </a:r>
             <a:endParaRPr lang="en-US" dirty="0"/>
           </a:p>
@@ -25702,7 +25702,7 @@
                   <a:srgbClr val="000000"/>
                 </a:solidFill>
               </a:rPr>
-              <a:t>6 probabilities</a:t>
+              <a:t>6 probabilities:</a:t>
             </a:r>
             <a:pPr indent="0" marL="0">
               <a:spcAft>
@@ -25716,7 +25716,7 @@
                   <a:srgbClr val="000000"/>
                 </a:solidFill>
               </a:rPr>
-              <a:t> and actions chosen so far</a:t>
+              <a:t> the chosen one in green</a:t>
             </a:r>
             <a:endParaRPr lang="en-US" dirty="0"/>
           </a:p>
@@ -25845,7 +25845,7 @@
                   <a:srgbClr val="000000"/>
                 </a:solidFill>
               </a:rPr>
-              <a:t>I on/off  Tab ghost  Space pause  Right step  O overlay  F slow-mo</a:t>
+              <a:t>I on/off  Tab ghost  Space pause  Left/Right step  O overlay  F slow-mo</a:t>
             </a:r>
             <a:endParaRPr lang="en-US" sz="1200" dirty="0"/>
           </a:p>
@@ -34955,6 +34955,26 @@
                 <a:cs typeface="Consolas" pitchFamily="34" charset="-120"/>
               </a:rPr>
               <a:t>I              debug mode</a:t>
+            </a:r>
+            <a:endParaRPr lang="en-US" sz="1300" dirty="0"/>
+          </a:p>
+          <a:p>
+            <a:pPr indent="0" marL="0">
+              <a:spcAft>
+                <a:spcPts val="300"/>
+              </a:spcAft>
+              <a:buNone/>
+            </a:pPr>
+            <a:r>
+              <a:rPr lang="en-US" sz="1300" dirty="0">
+                <a:solidFill>
+                  <a:srgbClr val="000000"/>
+                </a:solidFill>
+                <a:latin typeface="Consolas" pitchFamily="34" charset="0"/>
+                <a:ea typeface="Consolas" pitchFamily="34" charset="-122"/>
+                <a:cs typeface="Consolas" pitchFamily="34" charset="-120"/>
+              </a:rPr>
+              <a:t>S              deterministic / random</a:t>
             </a:r>
             <a:endParaRPr lang="en-US" sz="1300" dirty="0"/>
           </a:p>
